--- a/yocto_training_all_session_decks/session_decks/D3S8_CVE_Triage.pptx
+++ b/yocto_training_all_session_decks/session_decks/D3S8_CVE_Triage.pptx
@@ -5,25 +5,25 @@
     <p:sldMasterId id="2147483648" r:id="rId1"/>
   </p:sldMasterIdLst>
   <p:notesMasterIdLst>
-    <p:notesMasterId r:id="rId8"/>
+    <p:notesMasterId r:id="rId10"/>
   </p:notesMasterIdLst>
   <p:handoutMasterIdLst>
-    <p:handoutMasterId r:id="rId9"/>
+    <p:handoutMasterId r:id="rId11"/>
   </p:handoutMasterIdLst>
   <p:sldIdLst>
-    <p:sldId id="1007" r:id="rId18"/>
-    <p:sldId id="1008" r:id="rId19"/>
-    <p:sldId id="1009" r:id="rId20"/>
-    <p:sldId id="1010" r:id="rId21"/>
-    <p:sldId id="1011" r:id="rId22"/>
-    <p:sldId id="1012" r:id="rId23"/>
-    <p:sldId id="1013" r:id="rId24"/>
-    <p:sldId id="1014" r:id="rId25"/>
+    <p:sldId id="1007" r:id="rId2"/>
+    <p:sldId id="1008" r:id="rId3"/>
+    <p:sldId id="1009" r:id="rId4"/>
+    <p:sldId id="1010" r:id="rId5"/>
+    <p:sldId id="1011" r:id="rId6"/>
+    <p:sldId id="1012" r:id="rId7"/>
+    <p:sldId id="1013" r:id="rId8"/>
+    <p:sldId id="1014" r:id="rId9"/>
   </p:sldIdLst>
   <p:sldSz cx="12192000" cy="6858000"/>
   <p:notesSz cx="6858000" cy="9144000"/>
   <p:custDataLst>
-    <p:tags r:id="rId10"/>
+    <p:tags r:id="rId12"/>
   </p:custDataLst>
   <p:defaultTextStyle>
     <a:defPPr>
@@ -2929,7 +2929,7 @@
           <a:p>
             <a:fld id="{0CEC647C-F50C-4F78-AA33-D7AA6CDA18EE}" type="datetimeFigureOut">
               <a:rPr lang="en-US" smtClean="0"/>
-              <a:t>7/13/2025</a:t>
+              <a:t>6/11/2026</a:t>
             </a:fld>
             <a:endParaRPr lang="en-US"/>
           </a:p>
@@ -3094,7 +3094,7 @@
           <a:p>
             <a:fld id="{3A83341F-E62C-483B-84B4-966F8BE46097}" type="datetimeFigureOut">
               <a:rPr lang="en-US" smtClean="0"/>
-              <a:t>7/13/2025</a:t>
+              <a:t>6/11/2026</a:t>
             </a:fld>
             <a:endParaRPr lang="en-US"/>
           </a:p>
@@ -5178,8 +5178,8 @@
 </p:sldMaster>
 </file>
 
-<file path=ppt/slides/slide10.xml><?xml version="1.0" encoding="utf-8"?>
-<p:sld xmlns:a="http://schemas.openxmlformats.org/drawingml/2006/main" xmlns:p="http://schemas.openxmlformats.org/presentationml/2006/main" xmlns:r="http://schemas.openxmlformats.org/officeDocument/2006/relationships">
+<file path=ppt/slides/slide1.xml><?xml version="1.0" encoding="utf-8"?>
+<p:sld xmlns:a="http://schemas.openxmlformats.org/drawingml/2006/main" xmlns:r="http://schemas.openxmlformats.org/officeDocument/2006/relationships" xmlns:p="http://schemas.openxmlformats.org/presentationml/2006/main">
   <p:cSld>
     <p:spTree>
       <p:nvGrpSpPr>
@@ -5187,7 +5187,93 @@
         <p:cNvGrpSpPr/>
         <p:nvPr/>
       </p:nvGrpSpPr>
-      <p:grpSpPr/>
+      <p:grpSpPr>
+        <a:xfrm>
+          <a:off x="0" y="0"/>
+          <a:ext cx="0" cy="0"/>
+          <a:chOff x="0" y="0"/>
+          <a:chExt cx="0" cy="0"/>
+        </a:xfrm>
+      </p:grpSpPr>
+      <p:sp>
+        <p:nvSpPr>
+          <p:cNvPr id="2" name="Title 1"/>
+          <p:cNvSpPr>
+            <a:spLocks noGrp="1"/>
+          </p:cNvSpPr>
+          <p:nvPr>
+            <p:ph type="ctrTitle"/>
+          </p:nvPr>
+        </p:nvSpPr>
+        <p:spPr/>
+        <p:txBody>
+          <a:bodyPr/>
+          <a:lstStyle/>
+          <a:p>
+            <a:r>
+              <a:rPr sz="4400" b="1">
+                <a:solidFill>
+                  <a:srgbClr val="FFFFFF"/>
+                </a:solidFill>
+                <a:latin typeface="Calibri"/>
+              </a:rPr>
+              <a:t>CVE Triage</a:t>
+            </a:r>
+          </a:p>
+        </p:txBody>
+      </p:sp>
+      <p:sp>
+        <p:nvSpPr>
+          <p:cNvPr id="3" name="Subtitle 2"/>
+          <p:cNvSpPr>
+            <a:spLocks noGrp="1"/>
+          </p:cNvSpPr>
+          <p:nvPr>
+            <p:ph type="subTitle" idx="1"/>
+          </p:nvPr>
+        </p:nvSpPr>
+        <p:spPr/>
+        <p:txBody>
+          <a:bodyPr/>
+          <a:lstStyle/>
+          <a:p>
+            <a:r>
+              <a:rPr sz="1800" dirty="0">
+                <a:solidFill>
+                  <a:srgbClr val="FFFFFF"/>
+                </a:solidFill>
+                <a:latin typeface="Calibri"/>
+              </a:rPr>
+              <a:t>Find, classify, justify, and gate on vulnerabilities</a:t>
+            </a:r>
+          </a:p>
+        </p:txBody>
+      </p:sp>
+    </p:spTree>
+  </p:cSld>
+  <p:clrMapOvr>
+    <a:masterClrMapping/>
+  </p:clrMapOvr>
+</p:sld>
+</file>
+
+<file path=ppt/slides/slide2.xml><?xml version="1.0" encoding="utf-8"?>
+<p:sld xmlns:a="http://schemas.openxmlformats.org/drawingml/2006/main" xmlns:r="http://schemas.openxmlformats.org/officeDocument/2006/relationships" xmlns:p="http://schemas.openxmlformats.org/presentationml/2006/main">
+  <p:cSld>
+    <p:spTree>
+      <p:nvGrpSpPr>
+        <p:cNvPr id="1" name=""/>
+        <p:cNvGrpSpPr/>
+        <p:nvPr/>
+      </p:nvGrpSpPr>
+      <p:grpSpPr>
+        <a:xfrm>
+          <a:off x="0" y="0"/>
+          <a:ext cx="0" cy="0"/>
+          <a:chOff x="0" y="0"/>
+          <a:chExt cx="0" cy="0"/>
+        </a:xfrm>
+      </p:grpSpPr>
       <p:sp>
         <p:nvSpPr>
           <p:cNvPr id="2" name="Title 1"/>
@@ -5210,7 +5296,178 @@
                 </a:solidFill>
                 <a:latin typeface="Calibri"/>
               </a:rPr>
-              <a:t>Triage States</a:t>
+              <a:t>Session Agenda</a:t>
+            </a:r>
+          </a:p>
+        </p:txBody>
+      </p:sp>
+      <p:sp>
+        <p:nvSpPr>
+          <p:cNvPr id="3" name="TextBox 2"/>
+          <p:cNvSpPr txBox="1"/>
+          <p:nvPr/>
+        </p:nvSpPr>
+        <p:spPr>
+          <a:xfrm>
+            <a:off x="822960" y="1463040"/>
+            <a:ext cx="10515600" cy="5029200"/>
+          </a:xfrm>
+          <a:prstGeom prst="rect">
+            <a:avLst/>
+          </a:prstGeom>
+          <a:noFill/>
+        </p:spPr>
+        <p:txBody>
+          <a:bodyPr wrap="square" lIns="45720" rIns="45720">
+            <a:spAutoFit/>
+          </a:bodyPr>
+          <a:lstStyle/>
+          <a:p>
+            <a:pPr>
+              <a:spcAft>
+                <a:spcPts val="600"/>
+              </a:spcAft>
+            </a:pPr>
+            <a:r>
+              <a:rPr sz="2000" b="0" i="0">
+                <a:solidFill>
+                  <a:srgbClr val="333333"/>
+                </a:solidFill>
+                <a:latin typeface="Calibri"/>
+              </a:rPr>
+              <a:t>1.  cve-check — Yocto's CVE scanner</a:t>
+            </a:r>
+          </a:p>
+          <a:p>
+            <a:pPr>
+              <a:spcAft>
+                <a:spcPts val="600"/>
+              </a:spcAft>
+            </a:pPr>
+            <a:r>
+              <a:rPr sz="2000" b="0" i="0">
+                <a:solidFill>
+                  <a:srgbClr val="333333"/>
+                </a:solidFill>
+                <a:latin typeface="Calibri"/>
+              </a:rPr>
+              <a:t>2.  Reading a CVE report</a:t>
+            </a:r>
+          </a:p>
+          <a:p>
+            <a:pPr>
+              <a:spcAft>
+                <a:spcPts val="600"/>
+              </a:spcAft>
+            </a:pPr>
+            <a:r>
+              <a:rPr sz="2000" b="0" i="0">
+                <a:solidFill>
+                  <a:srgbClr val="333333"/>
+                </a:solidFill>
+                <a:latin typeface="Calibri"/>
+              </a:rPr>
+              <a:t>3.  Triage states: Patched, Ignored, Not affected</a:t>
+            </a:r>
+          </a:p>
+          <a:p>
+            <a:pPr>
+              <a:spcAft>
+                <a:spcPts val="600"/>
+              </a:spcAft>
+            </a:pPr>
+            <a:r>
+              <a:rPr sz="2000" b="0" i="0">
+                <a:solidFill>
+                  <a:srgbClr val="333333"/>
+                </a:solidFill>
+                <a:latin typeface="Calibri"/>
+              </a:rPr>
+              <a:t>4.  CVE_STATUS — writing justifications</a:t>
+            </a:r>
+          </a:p>
+          <a:p>
+            <a:pPr>
+              <a:spcAft>
+                <a:spcPts val="600"/>
+              </a:spcAft>
+            </a:pPr>
+            <a:r>
+              <a:rPr sz="2000" b="0" i="0">
+                <a:solidFill>
+                  <a:srgbClr val="333333"/>
+                </a:solidFill>
+                <a:latin typeface="Calibri"/>
+              </a:rPr>
+              <a:t>5.  VEX — communicating CVE status to customers</a:t>
+            </a:r>
+          </a:p>
+          <a:p>
+            <a:pPr>
+              <a:spcAft>
+                <a:spcPts val="600"/>
+              </a:spcAft>
+            </a:pPr>
+            <a:r>
+              <a:rPr sz="2000" b="0" i="0">
+                <a:solidFill>
+                  <a:srgbClr val="333333"/>
+                </a:solidFill>
+                <a:latin typeface="Calibri"/>
+              </a:rPr>
+              <a:t>6.  Release gating on CVE status</a:t>
+            </a:r>
+          </a:p>
+        </p:txBody>
+      </p:sp>
+    </p:spTree>
+  </p:cSld>
+  <p:clrMapOvr>
+    <a:masterClrMapping/>
+  </p:clrMapOvr>
+</p:sld>
+</file>
+
+<file path=ppt/slides/slide3.xml><?xml version="1.0" encoding="utf-8"?>
+<p:sld xmlns:a="http://schemas.openxmlformats.org/drawingml/2006/main" xmlns:r="http://schemas.openxmlformats.org/officeDocument/2006/relationships" xmlns:p="http://schemas.openxmlformats.org/presentationml/2006/main">
+  <p:cSld>
+    <p:spTree>
+      <p:nvGrpSpPr>
+        <p:cNvPr id="1" name=""/>
+        <p:cNvGrpSpPr/>
+        <p:nvPr/>
+      </p:nvGrpSpPr>
+      <p:grpSpPr>
+        <a:xfrm>
+          <a:off x="0" y="0"/>
+          <a:ext cx="0" cy="0"/>
+          <a:chOff x="0" y="0"/>
+          <a:chExt cx="0" cy="0"/>
+        </a:xfrm>
+      </p:grpSpPr>
+      <p:sp>
+        <p:nvSpPr>
+          <p:cNvPr id="2" name="Title 1"/>
+          <p:cNvSpPr>
+            <a:spLocks noGrp="1"/>
+          </p:cNvSpPr>
+          <p:nvPr>
+            <p:ph type="title"/>
+          </p:nvPr>
+        </p:nvSpPr>
+        <p:spPr/>
+        <p:txBody>
+          <a:bodyPr/>
+          <a:lstStyle/>
+          <a:p>
+            <a:r>
+              <a:rPr sz="3200" b="1">
+                <a:solidFill>
+                  <a:srgbClr val="CC0066"/>
+                </a:solidFill>
+                <a:latin typeface="Calibri"/>
+              </a:rPr>
+              <a:t>cve-check — Yocto's Scanner</a:t>
             </a:r>
           </a:p>
         </p:txBody>
@@ -5232,7 +5489,577 @@
           <a:noFill/>
         </p:spPr>
         <p:txBody>
-          <a:bodyPr wrap="square" anchor="t" lIns="45720" rIns="45720">
+          <a:bodyPr wrap="square" lIns="45720" rIns="45720" anchor="t">
+            <a:spAutoFit/>
+          </a:bodyPr>
+          <a:lstStyle/>
+          <a:p>
+            <a:pPr algn="l"/>
+            <a:r>
+              <a:rPr sz="1500" b="0" i="1">
+                <a:solidFill>
+                  <a:srgbClr val="666666"/>
+                </a:solidFill>
+                <a:latin typeface="Calibri"/>
+              </a:rPr>
+              <a:t>Compares your packages against the NVD CVE database.</a:t>
+            </a:r>
+          </a:p>
+        </p:txBody>
+      </p:sp>
+      <p:sp>
+        <p:nvSpPr>
+          <p:cNvPr id="4" name="Rounded Rectangle 3"/>
+          <p:cNvSpPr/>
+          <p:nvPr/>
+        </p:nvSpPr>
+        <p:spPr>
+          <a:xfrm>
+            <a:off x="822960" y="1783080"/>
+            <a:ext cx="10515600" cy="4572000"/>
+          </a:xfrm>
+          <a:prstGeom prst="roundRect">
+            <a:avLst/>
+          </a:prstGeom>
+          <a:solidFill>
+            <a:srgbClr val="F5F5F5"/>
+          </a:solidFill>
+          <a:ln w="6350">
+            <a:solidFill>
+              <a:srgbClr val="D0D0D0"/>
+            </a:solidFill>
+          </a:ln>
+          <a:effectLst/>
+        </p:spPr>
+        <p:style>
+          <a:lnRef idx="1">
+            <a:schemeClr val="accent1"/>
+          </a:lnRef>
+          <a:fillRef idx="3">
+            <a:schemeClr val="accent1"/>
+          </a:fillRef>
+          <a:effectRef idx="2">
+            <a:schemeClr val="accent1"/>
+          </a:effectRef>
+          <a:fontRef idx="minor">
+            <a:schemeClr val="lt1"/>
+          </a:fontRef>
+        </p:style>
+        <p:txBody>
+          <a:bodyPr rtlCol="0" anchor="ctr"/>
+          <a:lstStyle/>
+          <a:p>
+            <a:pPr algn="ctr"/>
+            <a:endParaRPr/>
+          </a:p>
+        </p:txBody>
+      </p:sp>
+      <p:sp>
+        <p:nvSpPr>
+          <p:cNvPr id="5" name="Rectangle 4"/>
+          <p:cNvSpPr/>
+          <p:nvPr/>
+        </p:nvSpPr>
+        <p:spPr>
+          <a:xfrm>
+            <a:off x="822960" y="1783080"/>
+            <a:ext cx="73152" cy="4572000"/>
+          </a:xfrm>
+          <a:prstGeom prst="rect">
+            <a:avLst/>
+          </a:prstGeom>
+          <a:solidFill>
+            <a:srgbClr val="CC0066"/>
+          </a:solidFill>
+          <a:ln>
+            <a:noFill/>
+          </a:ln>
+          <a:effectLst/>
+        </p:spPr>
+        <p:style>
+          <a:lnRef idx="1">
+            <a:schemeClr val="accent1"/>
+          </a:lnRef>
+          <a:fillRef idx="3">
+            <a:schemeClr val="accent1"/>
+          </a:fillRef>
+          <a:effectRef idx="2">
+            <a:schemeClr val="accent1"/>
+          </a:effectRef>
+          <a:fontRef idx="minor">
+            <a:schemeClr val="lt1"/>
+          </a:fontRef>
+        </p:style>
+        <p:txBody>
+          <a:bodyPr rtlCol="0" anchor="ctr"/>
+          <a:lstStyle/>
+          <a:p>
+            <a:pPr algn="ctr"/>
+            <a:endParaRPr/>
+          </a:p>
+        </p:txBody>
+      </p:sp>
+      <p:sp>
+        <p:nvSpPr>
+          <p:cNvPr id="6" name="TextBox 5"/>
+          <p:cNvSpPr txBox="1"/>
+          <p:nvPr/>
+        </p:nvSpPr>
+        <p:spPr>
+          <a:xfrm>
+            <a:off x="1005840" y="1874519"/>
+            <a:ext cx="10241280" cy="4389120"/>
+          </a:xfrm>
+          <a:prstGeom prst="rect">
+            <a:avLst/>
+          </a:prstGeom>
+          <a:noFill/>
+        </p:spPr>
+        <p:txBody>
+          <a:bodyPr wrap="square" lIns="45720" rIns="45720">
+            <a:spAutoFit/>
+          </a:bodyPr>
+          <a:lstStyle/>
+          <a:p>
+            <a:pPr>
+              <a:spcAft>
+                <a:spcPts val="0"/>
+              </a:spcAft>
+            </a:pPr>
+            <a:r>
+              <a:rPr sz="1000" i="1">
+                <a:solidFill>
+                  <a:srgbClr val="808080"/>
+                </a:solidFill>
+                <a:latin typeface="Consolas"/>
+              </a:rPr>
+              <a:t># Enable in local.conf</a:t>
+            </a:r>
+          </a:p>
+          <a:p>
+            <a:pPr>
+              <a:spcAft>
+                <a:spcPts val="0"/>
+              </a:spcAft>
+            </a:pPr>
+            <a:r>
+              <a:rPr sz="1000">
+                <a:solidFill>
+                  <a:srgbClr val="2D2D2D"/>
+                </a:solidFill>
+                <a:latin typeface="Consolas"/>
+              </a:rPr>
+              <a:t>INHERIT += "cve-check"</a:t>
+            </a:r>
+          </a:p>
+          <a:p>
+            <a:pPr>
+              <a:spcAft>
+                <a:spcPts val="0"/>
+              </a:spcAft>
+            </a:pPr>
+            <a:r>
+              <a:rPr sz="1000">
+                <a:solidFill>
+                  <a:srgbClr val="2D2D2D"/>
+                </a:solidFill>
+                <a:latin typeface="Consolas"/>
+              </a:rPr>
+              <a:t> </a:t>
+            </a:r>
+          </a:p>
+          <a:p>
+            <a:pPr>
+              <a:spcAft>
+                <a:spcPts val="0"/>
+              </a:spcAft>
+            </a:pPr>
+            <a:r>
+              <a:rPr sz="1000" i="1">
+                <a:solidFill>
+                  <a:srgbClr val="808080"/>
+                </a:solidFill>
+                <a:latin typeface="Consolas"/>
+              </a:rPr>
+              <a:t># Build (first run downloads the NVD feed, can take 5-10 min)</a:t>
+            </a:r>
+          </a:p>
+          <a:p>
+            <a:pPr>
+              <a:spcAft>
+                <a:spcPts val="0"/>
+              </a:spcAft>
+            </a:pPr>
+            <a:r>
+              <a:rPr sz="1000">
+                <a:solidFill>
+                  <a:srgbClr val="2D2D2D"/>
+                </a:solidFill>
+                <a:latin typeface="Consolas"/>
+              </a:rPr>
+              <a:t>bitbake core-image-base</a:t>
+            </a:r>
+          </a:p>
+          <a:p>
+            <a:pPr>
+              <a:spcAft>
+                <a:spcPts val="0"/>
+              </a:spcAft>
+            </a:pPr>
+            <a:r>
+              <a:rPr sz="1000">
+                <a:solidFill>
+                  <a:srgbClr val="2D2D2D"/>
+                </a:solidFill>
+                <a:latin typeface="Consolas"/>
+              </a:rPr>
+              <a:t> </a:t>
+            </a:r>
+          </a:p>
+          <a:p>
+            <a:pPr>
+              <a:spcAft>
+                <a:spcPts val="0"/>
+              </a:spcAft>
+            </a:pPr>
+            <a:r>
+              <a:rPr sz="1000" i="1">
+                <a:solidFill>
+                  <a:srgbClr val="808080"/>
+                </a:solidFill>
+                <a:latin typeface="Consolas"/>
+              </a:rPr>
+              <a:t># Find reports</a:t>
+            </a:r>
+          </a:p>
+          <a:p>
+            <a:pPr>
+              <a:spcAft>
+                <a:spcPts val="0"/>
+              </a:spcAft>
+            </a:pPr>
+            <a:r>
+              <a:rPr sz="1000">
+                <a:solidFill>
+                  <a:srgbClr val="2D2D2D"/>
+                </a:solidFill>
+                <a:latin typeface="Consolas"/>
+              </a:rPr>
+              <a:t>ls tmp/deploy/cve/</a:t>
+            </a:r>
+          </a:p>
+          <a:p>
+            <a:pPr>
+              <a:spcAft>
+                <a:spcPts val="0"/>
+              </a:spcAft>
+            </a:pPr>
+            <a:r>
+              <a:rPr sz="1000" i="1">
+                <a:solidFill>
+                  <a:srgbClr val="808080"/>
+                </a:solidFill>
+                <a:latin typeface="Consolas"/>
+              </a:rPr>
+              <a:t># Per-recipe: tmp/work/.../mypkg/.../cve_check</a:t>
+            </a:r>
+          </a:p>
+          <a:p>
+            <a:pPr>
+              <a:spcAft>
+                <a:spcPts val="0"/>
+              </a:spcAft>
+            </a:pPr>
+            <a:r>
+              <a:rPr sz="1000" i="1">
+                <a:solidFill>
+                  <a:srgbClr val="808080"/>
+                </a:solidFill>
+                <a:latin typeface="Consolas"/>
+              </a:rPr>
+              <a:t># Per-image: tmp/deploy/cve/core-image-base-&lt;machine&gt;.txt</a:t>
+            </a:r>
+          </a:p>
+          <a:p>
+            <a:pPr>
+              <a:spcAft>
+                <a:spcPts val="0"/>
+              </a:spcAft>
+            </a:pPr>
+            <a:r>
+              <a:rPr sz="1000">
+                <a:solidFill>
+                  <a:srgbClr val="2D2D2D"/>
+                </a:solidFill>
+                <a:latin typeface="Consolas"/>
+              </a:rPr>
+              <a:t> </a:t>
+            </a:r>
+          </a:p>
+          <a:p>
+            <a:pPr>
+              <a:spcAft>
+                <a:spcPts val="0"/>
+              </a:spcAft>
+            </a:pPr>
+            <a:r>
+              <a:rPr sz="1000" i="1">
+                <a:solidFill>
+                  <a:srgbClr val="808080"/>
+                </a:solidFill>
+                <a:latin typeface="Consolas"/>
+              </a:rPr>
+              <a:t># Read the image-level summary</a:t>
+            </a:r>
+          </a:p>
+          <a:p>
+            <a:pPr>
+              <a:spcAft>
+                <a:spcPts val="0"/>
+              </a:spcAft>
+            </a:pPr>
+            <a:r>
+              <a:rPr sz="1000">
+                <a:solidFill>
+                  <a:srgbClr val="2D2D2D"/>
+                </a:solidFill>
+                <a:latin typeface="Consolas"/>
+              </a:rPr>
+              <a:t>cat tmp/deploy/cve/core-image-base-*.txt</a:t>
+            </a:r>
+          </a:p>
+          <a:p>
+            <a:pPr>
+              <a:spcAft>
+                <a:spcPts val="0"/>
+              </a:spcAft>
+            </a:pPr>
+            <a:r>
+              <a:rPr sz="1000">
+                <a:solidFill>
+                  <a:srgbClr val="2D2D2D"/>
+                </a:solidFill>
+                <a:latin typeface="Consolas"/>
+              </a:rPr>
+              <a:t> </a:t>
+            </a:r>
+          </a:p>
+          <a:p>
+            <a:pPr>
+              <a:spcAft>
+                <a:spcPts val="0"/>
+              </a:spcAft>
+            </a:pPr>
+            <a:r>
+              <a:rPr sz="1000" i="1">
+                <a:solidFill>
+                  <a:srgbClr val="808080"/>
+                </a:solidFill>
+                <a:latin typeface="Consolas"/>
+              </a:rPr>
+              <a:t># Format:</a:t>
+            </a:r>
+          </a:p>
+          <a:p>
+            <a:pPr>
+              <a:spcAft>
+                <a:spcPts val="0"/>
+              </a:spcAft>
+            </a:pPr>
+            <a:r>
+              <a:rPr sz="1000" i="1">
+                <a:solidFill>
+                  <a:srgbClr val="808080"/>
+                </a:solidFill>
+                <a:latin typeface="Consolas"/>
+              </a:rPr>
+              <a:t># PACKAGE NAME: openssl</a:t>
+            </a:r>
+          </a:p>
+          <a:p>
+            <a:pPr>
+              <a:spcAft>
+                <a:spcPts val="0"/>
+              </a:spcAft>
+            </a:pPr>
+            <a:r>
+              <a:rPr sz="1000" i="1">
+                <a:solidFill>
+                  <a:srgbClr val="808080"/>
+                </a:solidFill>
+                <a:latin typeface="Consolas"/>
+              </a:rPr>
+              <a:t># PACKAGE VERSION: 3.0.10</a:t>
+            </a:r>
+          </a:p>
+          <a:p>
+            <a:pPr>
+              <a:spcAft>
+                <a:spcPts val="0"/>
+              </a:spcAft>
+            </a:pPr>
+            <a:r>
+              <a:rPr sz="1000" i="1">
+                <a:solidFill>
+                  <a:srgbClr val="808080"/>
+                </a:solidFill>
+                <a:latin typeface="Consolas"/>
+              </a:rPr>
+              <a:t># CVE: CVE-2023-3446</a:t>
+            </a:r>
+          </a:p>
+          <a:p>
+            <a:pPr>
+              <a:spcAft>
+                <a:spcPts val="0"/>
+              </a:spcAft>
+            </a:pPr>
+            <a:r>
+              <a:rPr sz="1000" i="1">
+                <a:solidFill>
+                  <a:srgbClr val="808080"/>
+                </a:solidFill>
+                <a:latin typeface="Consolas"/>
+              </a:rPr>
+              <a:t># CVE STATUS: Patched</a:t>
+            </a:r>
+          </a:p>
+          <a:p>
+            <a:pPr>
+              <a:spcAft>
+                <a:spcPts val="0"/>
+              </a:spcAft>
+            </a:pPr>
+            <a:r>
+              <a:rPr sz="1000" i="1">
+                <a:solidFill>
+                  <a:srgbClr val="808080"/>
+                </a:solidFill>
+                <a:latin typeface="Consolas"/>
+              </a:rPr>
+              <a:t># CVE SUMMARY: Excessive time in DH_check_pub_key()...</a:t>
+            </a:r>
+          </a:p>
+          <a:p>
+            <a:pPr>
+              <a:spcAft>
+                <a:spcPts val="0"/>
+              </a:spcAft>
+            </a:pPr>
+            <a:r>
+              <a:rPr sz="1000" i="1">
+                <a:solidFill>
+                  <a:srgbClr val="808080"/>
+                </a:solidFill>
+                <a:latin typeface="Consolas"/>
+              </a:rPr>
+              <a:t># CVSS v3 SCORE: 5.3</a:t>
+            </a:r>
+          </a:p>
+          <a:p>
+            <a:pPr>
+              <a:spcAft>
+                <a:spcPts val="0"/>
+              </a:spcAft>
+            </a:pPr>
+            <a:r>
+              <a:rPr sz="1000" i="1">
+                <a:solidFill>
+                  <a:srgbClr val="808080"/>
+                </a:solidFill>
+                <a:latin typeface="Consolas"/>
+              </a:rPr>
+              <a:t># VECTOR: NETWORK</a:t>
+            </a:r>
+          </a:p>
+          <a:p>
+            <a:pPr>
+              <a:spcAft>
+                <a:spcPts val="0"/>
+              </a:spcAft>
+            </a:pPr>
+            <a:r>
+              <a:rPr sz="1000" i="1">
+                <a:solidFill>
+                  <a:srgbClr val="808080"/>
+                </a:solidFill>
+                <a:latin typeface="Consolas"/>
+              </a:rPr>
+              <a:t># MORE INFORMATION: https://nvd.nist.gov/vuln/detail/CVE-2023-3446</a:t>
+            </a:r>
+          </a:p>
+        </p:txBody>
+      </p:sp>
+    </p:spTree>
+  </p:cSld>
+  <p:clrMapOvr>
+    <a:masterClrMapping/>
+  </p:clrMapOvr>
+</p:sld>
+</file>
+
+<file path=ppt/slides/slide4.xml><?xml version="1.0" encoding="utf-8"?>
+<p:sld xmlns:a="http://schemas.openxmlformats.org/drawingml/2006/main" xmlns:r="http://schemas.openxmlformats.org/officeDocument/2006/relationships" xmlns:p="http://schemas.openxmlformats.org/presentationml/2006/main">
+  <p:cSld>
+    <p:spTree>
+      <p:nvGrpSpPr>
+        <p:cNvPr id="1" name=""/>
+        <p:cNvGrpSpPr/>
+        <p:nvPr/>
+      </p:nvGrpSpPr>
+      <p:grpSpPr>
+        <a:xfrm>
+          <a:off x="0" y="0"/>
+          <a:ext cx="0" cy="0"/>
+          <a:chOff x="0" y="0"/>
+          <a:chExt cx="0" cy="0"/>
+        </a:xfrm>
+      </p:grpSpPr>
+      <p:sp>
+        <p:nvSpPr>
+          <p:cNvPr id="2" name="Title 1"/>
+          <p:cNvSpPr>
+            <a:spLocks noGrp="1"/>
+          </p:cNvSpPr>
+          <p:nvPr>
+            <p:ph type="title"/>
+          </p:nvPr>
+        </p:nvSpPr>
+        <p:spPr/>
+        <p:txBody>
+          <a:bodyPr/>
+          <a:lstStyle/>
+          <a:p>
+            <a:r>
+              <a:rPr sz="3200" b="1">
+                <a:solidFill>
+                  <a:srgbClr val="CC0066"/>
+                </a:solidFill>
+                <a:latin typeface="Calibri"/>
+              </a:rPr>
+              <a:t>Triage States</a:t>
+            </a:r>
+          </a:p>
+        </p:txBody>
+      </p:sp>
+      <p:sp>
+        <p:nvSpPr>
+          <p:cNvPr id="3" name="TextBox 2"/>
+          <p:cNvSpPr txBox="1"/>
+          <p:nvPr/>
+        </p:nvSpPr>
+        <p:spPr>
+          <a:xfrm>
+            <a:off x="822960" y="1417320"/>
+            <a:ext cx="10515600" cy="365760"/>
+          </a:xfrm>
+          <a:prstGeom prst="rect">
+            <a:avLst/>
+          </a:prstGeom>
+          <a:noFill/>
+        </p:spPr>
+        <p:txBody>
+          <a:bodyPr wrap="square" lIns="45720" rIns="45720" anchor="t">
             <a:spAutoFit/>
           </a:bodyPr>
           <a:lstStyle/>
@@ -5287,7 +6114,7 @@
           </a:fontRef>
         </p:style>
         <p:txBody>
-          <a:bodyPr rtlCol="0" anchor="ctr" lIns="182880"/>
+          <a:bodyPr lIns="182880" rtlCol="0" anchor="ctr"/>
           <a:lstStyle/>
           <a:p>
             <a:pPr algn="ctr"/>
@@ -5357,6 +6184,7 @@
           <a:lstStyle/>
           <a:p>
             <a:pPr algn="ctr"/>
+            <a:endParaRPr/>
           </a:p>
         </p:txBody>
       </p:sp>
@@ -5435,15 +6263,12 @@
                 <a:spcPts val="400"/>
               </a:spcAft>
             </a:pPr>
-            <a:r>
-              <a:rPr sz="1100" b="0" i="0">
-                <a:solidFill>
-                  <a:srgbClr val="333333"/>
-                </a:solidFill>
-                <a:latin typeface="Calibri"/>
-              </a:rPr>
-              <a:t/>
-            </a:r>
+            <a:endParaRPr sz="1100" b="0" i="0">
+              <a:solidFill>
+                <a:srgbClr val="333333"/>
+              </a:solidFill>
+              <a:latin typeface="Calibri"/>
+            </a:endParaRPr>
           </a:p>
           <a:p>
             <a:pPr>
@@ -5564,7 +6389,7 @@
           </a:fontRef>
         </p:style>
         <p:txBody>
-          <a:bodyPr rtlCol="0" anchor="ctr" lIns="182880"/>
+          <a:bodyPr lIns="182880" rtlCol="0" anchor="ctr"/>
           <a:lstStyle/>
           <a:p>
             <a:pPr algn="ctr"/>
@@ -5634,6 +6459,7 @@
           <a:lstStyle/>
           <a:p>
             <a:pPr algn="ctr"/>
+            <a:endParaRPr/>
           </a:p>
         </p:txBody>
       </p:sp>
@@ -5728,15 +6554,12 @@
                 <a:spcPts val="400"/>
               </a:spcAft>
             </a:pPr>
-            <a:r>
-              <a:rPr sz="1100" b="0" i="0">
-                <a:solidFill>
-                  <a:srgbClr val="333333"/>
-                </a:solidFill>
-                <a:latin typeface="Calibri"/>
-              </a:rPr>
-              <a:t/>
-            </a:r>
+            <a:endParaRPr sz="1100" b="0" i="0">
+              <a:solidFill>
+                <a:srgbClr val="333333"/>
+              </a:solidFill>
+              <a:latin typeface="Calibri"/>
+            </a:endParaRPr>
           </a:p>
           <a:p>
             <a:pPr>
@@ -5841,7 +6664,7 @@
           </a:fontRef>
         </p:style>
         <p:txBody>
-          <a:bodyPr rtlCol="0" anchor="ctr" lIns="182880"/>
+          <a:bodyPr lIns="182880" rtlCol="0" anchor="ctr"/>
           <a:lstStyle/>
           <a:p>
             <a:pPr algn="ctr"/>
@@ -5911,6 +6734,7 @@
           <a:lstStyle/>
           <a:p>
             <a:pPr algn="ctr"/>
+            <a:endParaRPr/>
           </a:p>
         </p:txBody>
       </p:sp>
@@ -5989,15 +6813,12 @@
                 <a:spcPts val="400"/>
               </a:spcAft>
             </a:pPr>
-            <a:r>
-              <a:rPr sz="1100" b="0" i="0">
-                <a:solidFill>
-                  <a:srgbClr val="333333"/>
-                </a:solidFill>
-                <a:latin typeface="Calibri"/>
-              </a:rPr>
-              <a:t/>
-            </a:r>
+            <a:endParaRPr sz="1100" b="0" i="0">
+              <a:solidFill>
+                <a:srgbClr val="333333"/>
+              </a:solidFill>
+              <a:latin typeface="Calibri"/>
+            </a:endParaRPr>
           </a:p>
           <a:p>
             <a:pPr>
@@ -6073,8 +6894,8 @@
 </p:sld>
 </file>
 
-<file path=ppt/slides/slide11.xml><?xml version="1.0" encoding="utf-8"?>
-<p:sld xmlns:a="http://schemas.openxmlformats.org/drawingml/2006/main" xmlns:p="http://schemas.openxmlformats.org/presentationml/2006/main" xmlns:r="http://schemas.openxmlformats.org/officeDocument/2006/relationships">
+<file path=ppt/slides/slide5.xml><?xml version="1.0" encoding="utf-8"?>
+<p:sld xmlns:a="http://schemas.openxmlformats.org/drawingml/2006/main" xmlns:r="http://schemas.openxmlformats.org/officeDocument/2006/relationships" xmlns:p="http://schemas.openxmlformats.org/presentationml/2006/main">
   <p:cSld>
     <p:spTree>
       <p:nvGrpSpPr>
@@ -6082,7 +6903,14 @@
         <p:cNvGrpSpPr/>
         <p:nvPr/>
       </p:nvGrpSpPr>
-      <p:grpSpPr/>
+      <p:grpSpPr>
+        <a:xfrm>
+          <a:off x="0" y="0"/>
+          <a:ext cx="0" cy="0"/>
+          <a:chOff x="0" y="0"/>
+          <a:chExt cx="0" cy="0"/>
+        </a:xfrm>
+      </p:grpSpPr>
       <p:sp>
         <p:nvSpPr>
           <p:cNvPr id="2" name="Title 1"/>
@@ -6127,7 +6955,7 @@
           <a:noFill/>
         </p:spPr>
         <p:txBody>
-          <a:bodyPr wrap="square" anchor="t" lIns="45720" rIns="45720">
+          <a:bodyPr wrap="square" lIns="45720" rIns="45720" anchor="t">
             <a:spAutoFit/>
           </a:bodyPr>
           <a:lstStyle/>
@@ -6188,6 +7016,7 @@
           <a:lstStyle/>
           <a:p>
             <a:pPr algn="ctr"/>
+            <a:endParaRPr/>
           </a:p>
         </p:txBody>
       </p:sp>
@@ -6232,6 +7061,7 @@
           <a:lstStyle/>
           <a:p>
             <a:pPr algn="ctr"/>
+            <a:endParaRPr/>
           </a:p>
         </p:txBody>
       </p:sp>
@@ -6554,8 +7384,8 @@
 </p:sld>
 </file>
 
-<file path=ppt/slides/slide12.xml><?xml version="1.0" encoding="utf-8"?>
-<p:sld xmlns:a="http://schemas.openxmlformats.org/drawingml/2006/main" xmlns:p="http://schemas.openxmlformats.org/presentationml/2006/main" xmlns:r="http://schemas.openxmlformats.org/officeDocument/2006/relationships">
+<file path=ppt/slides/slide6.xml><?xml version="1.0" encoding="utf-8"?>
+<p:sld xmlns:a="http://schemas.openxmlformats.org/drawingml/2006/main" xmlns:r="http://schemas.openxmlformats.org/officeDocument/2006/relationships" xmlns:p="http://schemas.openxmlformats.org/presentationml/2006/main">
   <p:cSld>
     <p:spTree>
       <p:nvGrpSpPr>
@@ -6563,7 +7393,14 @@
         <p:cNvGrpSpPr/>
         <p:nvPr/>
       </p:nvGrpSpPr>
-      <p:grpSpPr/>
+      <p:grpSpPr>
+        <a:xfrm>
+          <a:off x="0" y="0"/>
+          <a:ext cx="0" cy="0"/>
+          <a:chOff x="0" y="0"/>
+          <a:chExt cx="0" cy="0"/>
+        </a:xfrm>
+      </p:grpSpPr>
       <p:sp>
         <p:nvSpPr>
           <p:cNvPr id="2" name="Title 1"/>
@@ -6608,7 +7445,7 @@
           <a:noFill/>
         </p:spPr>
         <p:txBody>
-          <a:bodyPr wrap="square" anchor="t" lIns="45720" rIns="45720">
+          <a:bodyPr wrap="square" lIns="45720" rIns="45720" anchor="t">
             <a:spAutoFit/>
           </a:bodyPr>
           <a:lstStyle/>
@@ -6849,8 +7686,8 @@
 </p:sld>
 </file>
 
-<file path=ppt/slides/slide13.xml><?xml version="1.0" encoding="utf-8"?>
-<p:sld xmlns:a="http://schemas.openxmlformats.org/drawingml/2006/main" xmlns:p="http://schemas.openxmlformats.org/presentationml/2006/main" xmlns:r="http://schemas.openxmlformats.org/officeDocument/2006/relationships">
+<file path=ppt/slides/slide7.xml><?xml version="1.0" encoding="utf-8"?>
+<p:sld xmlns:a="http://schemas.openxmlformats.org/drawingml/2006/main" xmlns:r="http://schemas.openxmlformats.org/officeDocument/2006/relationships" xmlns:p="http://schemas.openxmlformats.org/presentationml/2006/main">
   <p:cSld>
     <p:spTree>
       <p:nvGrpSpPr>
@@ -6858,7 +7695,14 @@
         <p:cNvGrpSpPr/>
         <p:nvPr/>
       </p:nvGrpSpPr>
-      <p:grpSpPr/>
+      <p:grpSpPr>
+        <a:xfrm>
+          <a:off x="0" y="0"/>
+          <a:ext cx="0" cy="0"/>
+          <a:chOff x="0" y="0"/>
+          <a:chExt cx="0" cy="0"/>
+        </a:xfrm>
+      </p:grpSpPr>
       <p:sp>
         <p:nvSpPr>
           <p:cNvPr id="2" name="Title 1"/>
@@ -6903,7 +7747,7 @@
           <a:noFill/>
         </p:spPr>
         <p:txBody>
-          <a:bodyPr wrap="square" anchor="t" lIns="45720" rIns="45720">
+          <a:bodyPr wrap="square" lIns="45720" rIns="45720" anchor="t">
             <a:spAutoFit/>
           </a:bodyPr>
           <a:lstStyle/>
@@ -6964,6 +7808,7 @@
           <a:lstStyle/>
           <a:p>
             <a:pPr algn="ctr"/>
+            <a:endParaRPr/>
           </a:p>
         </p:txBody>
       </p:sp>
@@ -7008,6 +7853,7 @@
           <a:lstStyle/>
           <a:p>
             <a:pPr algn="ctr"/>
+            <a:endParaRPr/>
           </a:p>
         </p:txBody>
       </p:sp>
@@ -7423,7 +8269,7 @@
           </a:fontRef>
         </p:style>
         <p:txBody>
-          <a:bodyPr rtlCol="0" anchor="ctr" lIns="228600" rIns="228600" wrap="square"/>
+          <a:bodyPr wrap="square" lIns="228600" rIns="228600" rtlCol="0" anchor="ctr"/>
           <a:lstStyle/>
           <a:p>
             <a:pPr algn="l"/>
@@ -7447,8 +8293,8 @@
 </p:sld>
 </file>
 
-<file path=ppt/slides/slide14.xml><?xml version="1.0" encoding="utf-8"?>
-<p:sld xmlns:a="http://schemas.openxmlformats.org/drawingml/2006/main" xmlns:p="http://schemas.openxmlformats.org/presentationml/2006/main" xmlns:r="http://schemas.openxmlformats.org/officeDocument/2006/relationships">
+<file path=ppt/slides/slide8.xml><?xml version="1.0" encoding="utf-8"?>
+<p:sld xmlns:a="http://schemas.openxmlformats.org/drawingml/2006/main" xmlns:r="http://schemas.openxmlformats.org/officeDocument/2006/relationships" xmlns:p="http://schemas.openxmlformats.org/presentationml/2006/main">
   <p:cSld>
     <p:spTree>
       <p:nvGrpSpPr>
@@ -7456,7 +8302,14 @@
         <p:cNvGrpSpPr/>
         <p:nvPr/>
       </p:nvGrpSpPr>
-      <p:grpSpPr/>
+      <p:grpSpPr>
+        <a:xfrm>
+          <a:off x="0" y="0"/>
+          <a:ext cx="0" cy="0"/>
+          <a:chOff x="0" y="0"/>
+          <a:chExt cx="0" cy="0"/>
+        </a:xfrm>
+      </p:grpSpPr>
       <p:sp>
         <p:nvSpPr>
           <p:cNvPr id="2" name="Title 1"/>
@@ -7501,7 +8354,7 @@
           <a:noFill/>
         </p:spPr>
         <p:txBody>
-          <a:bodyPr wrap="square" anchor="t" lIns="45720" rIns="45720">
+          <a:bodyPr wrap="square" lIns="45720" rIns="45720" anchor="t">
             <a:spAutoFit/>
           </a:bodyPr>
           <a:lstStyle/>
@@ -7556,7 +8409,7 @@
           </a:fontRef>
         </p:style>
         <p:txBody>
-          <a:bodyPr rtlCol="0" anchor="ctr" lIns="0" rIns="0"/>
+          <a:bodyPr lIns="0" rIns="0" rtlCol="0" anchor="ctr"/>
           <a:lstStyle/>
           <a:p>
             <a:pPr algn="ctr"/>
@@ -7589,7 +8442,7 @@
           <a:noFill/>
         </p:spPr>
         <p:txBody>
-          <a:bodyPr wrap="square" anchor="t" lIns="45720" rIns="45720">
+          <a:bodyPr wrap="square" lIns="45720" rIns="45720" anchor="t">
             <a:spAutoFit/>
           </a:bodyPr>
           <a:lstStyle/>
@@ -7624,7 +8477,7 @@
           <a:noFill/>
         </p:spPr>
         <p:txBody>
-          <a:bodyPr wrap="square" anchor="t" lIns="45720" rIns="45720">
+          <a:bodyPr wrap="square" lIns="45720" rIns="45720" anchor="t">
             <a:spAutoFit/>
           </a:bodyPr>
           <a:lstStyle/>
@@ -7679,7 +8532,7 @@
           </a:fontRef>
         </p:style>
         <p:txBody>
-          <a:bodyPr rtlCol="0" anchor="ctr" lIns="0" rIns="0"/>
+          <a:bodyPr lIns="0" rIns="0" rtlCol="0" anchor="ctr"/>
           <a:lstStyle/>
           <a:p>
             <a:pPr algn="ctr"/>
@@ -7712,7 +8565,7 @@
           <a:noFill/>
         </p:spPr>
         <p:txBody>
-          <a:bodyPr wrap="square" anchor="t" lIns="45720" rIns="45720">
+          <a:bodyPr wrap="square" lIns="45720" rIns="45720" anchor="t">
             <a:spAutoFit/>
           </a:bodyPr>
           <a:lstStyle/>
@@ -7747,7 +8600,7 @@
           <a:noFill/>
         </p:spPr>
         <p:txBody>
-          <a:bodyPr wrap="square" anchor="t" lIns="45720" rIns="45720">
+          <a:bodyPr wrap="square" lIns="45720" rIns="45720" anchor="t">
             <a:spAutoFit/>
           </a:bodyPr>
           <a:lstStyle/>
@@ -7802,7 +8655,7 @@
           </a:fontRef>
         </p:style>
         <p:txBody>
-          <a:bodyPr rtlCol="0" anchor="ctr" lIns="0" rIns="0"/>
+          <a:bodyPr lIns="0" rIns="0" rtlCol="0" anchor="ctr"/>
           <a:lstStyle/>
           <a:p>
             <a:pPr algn="ctr"/>
@@ -7835,7 +8688,7 @@
           <a:noFill/>
         </p:spPr>
         <p:txBody>
-          <a:bodyPr wrap="square" anchor="t" lIns="45720" rIns="45720">
+          <a:bodyPr wrap="square" lIns="45720" rIns="45720" anchor="t">
             <a:spAutoFit/>
           </a:bodyPr>
           <a:lstStyle/>
@@ -7870,7 +8723,7 @@
           <a:noFill/>
         </p:spPr>
         <p:txBody>
-          <a:bodyPr wrap="square" anchor="t" lIns="45720" rIns="45720">
+          <a:bodyPr wrap="square" lIns="45720" rIns="45720" anchor="t">
             <a:spAutoFit/>
           </a:bodyPr>
           <a:lstStyle/>
@@ -7925,7 +8778,7 @@
           </a:fontRef>
         </p:style>
         <p:txBody>
-          <a:bodyPr rtlCol="0" anchor="ctr" lIns="0" rIns="0"/>
+          <a:bodyPr lIns="0" rIns="0" rtlCol="0" anchor="ctr"/>
           <a:lstStyle/>
           <a:p>
             <a:pPr algn="ctr"/>
@@ -7958,7 +8811,7 @@
           <a:noFill/>
         </p:spPr>
         <p:txBody>
-          <a:bodyPr wrap="square" anchor="t" lIns="45720" rIns="45720">
+          <a:bodyPr wrap="square" lIns="45720" rIns="45720" anchor="t">
             <a:spAutoFit/>
           </a:bodyPr>
           <a:lstStyle/>
@@ -7993,7 +8846,7 @@
           <a:noFill/>
         </p:spPr>
         <p:txBody>
-          <a:bodyPr wrap="square" anchor="t" lIns="45720" rIns="45720">
+          <a:bodyPr wrap="square" lIns="45720" rIns="45720" anchor="t">
             <a:spAutoFit/>
           </a:bodyPr>
           <a:lstStyle/>
@@ -8048,7 +8901,7 @@
           </a:fontRef>
         </p:style>
         <p:txBody>
-          <a:bodyPr rtlCol="0" anchor="ctr" lIns="0" rIns="0"/>
+          <a:bodyPr lIns="0" rIns="0" rtlCol="0" anchor="ctr"/>
           <a:lstStyle/>
           <a:p>
             <a:pPr algn="ctr"/>
@@ -8081,7 +8934,7 @@
           <a:noFill/>
         </p:spPr>
         <p:txBody>
-          <a:bodyPr wrap="square" anchor="t" lIns="45720" rIns="45720">
+          <a:bodyPr wrap="square" lIns="45720" rIns="45720" anchor="t">
             <a:spAutoFit/>
           </a:bodyPr>
           <a:lstStyle/>
@@ -8116,7 +8969,7 @@
           <a:noFill/>
         </p:spPr>
         <p:txBody>
-          <a:bodyPr wrap="square" anchor="t" lIns="45720" rIns="45720">
+          <a:bodyPr wrap="square" lIns="45720" rIns="45720" anchor="t">
             <a:spAutoFit/>
           </a:bodyPr>
           <a:lstStyle/>
@@ -8171,7 +9024,7 @@
           </a:fontRef>
         </p:style>
         <p:txBody>
-          <a:bodyPr rtlCol="0" anchor="ctr" lIns="228600"/>
+          <a:bodyPr lIns="228600" rtlCol="0" anchor="ctr"/>
           <a:lstStyle/>
           <a:p>
             <a:pPr algn="ctr"/>
@@ -8192,814 +9045,6 @@
                 <a:latin typeface="Calibri"/>
               </a:rPr>
               <a:t>QA &amp; Quality Gates (15 min)</a:t>
-            </a:r>
-          </a:p>
-        </p:txBody>
-      </p:sp>
-    </p:spTree>
-  </p:cSld>
-  <p:clrMapOvr>
-    <a:masterClrMapping/>
-  </p:clrMapOvr>
-</p:sld>
-</file>
-
-<file path=ppt/slides/slide7.xml><?xml version="1.0" encoding="utf-8"?>
-<p:sld xmlns:a="http://schemas.openxmlformats.org/drawingml/2006/main" xmlns:p="http://schemas.openxmlformats.org/presentationml/2006/main" xmlns:r="http://schemas.openxmlformats.org/officeDocument/2006/relationships">
-  <p:cSld>
-    <p:spTree>
-      <p:nvGrpSpPr>
-        <p:cNvPr id="1" name=""/>
-        <p:cNvGrpSpPr/>
-        <p:nvPr/>
-      </p:nvGrpSpPr>
-      <p:grpSpPr/>
-      <p:sp>
-        <p:nvSpPr>
-          <p:cNvPr id="2" name="Title 1"/>
-          <p:cNvSpPr>
-            <a:spLocks noGrp="1"/>
-          </p:cNvSpPr>
-          <p:nvPr>
-            <p:ph type="ctrTitle"/>
-          </p:nvPr>
-        </p:nvSpPr>
-        <p:spPr/>
-        <p:txBody>
-          <a:bodyPr/>
-          <a:lstStyle/>
-          <a:p>
-            <a:r>
-              <a:rPr sz="4400" b="1">
-                <a:solidFill>
-                  <a:srgbClr val="FFFFFF"/>
-                </a:solidFill>
-                <a:latin typeface="Calibri"/>
-              </a:rPr>
-              <a:t>CVE Triage</a:t>
-            </a:r>
-          </a:p>
-        </p:txBody>
-      </p:sp>
-      <p:sp>
-        <p:nvSpPr>
-          <p:cNvPr id="3" name="Subtitle 2"/>
-          <p:cNvSpPr>
-            <a:spLocks noGrp="1"/>
-          </p:cNvSpPr>
-          <p:nvPr>
-            <p:ph type="subTitle" idx="1"/>
-          </p:nvPr>
-        </p:nvSpPr>
-        <p:spPr/>
-        <p:txBody>
-          <a:bodyPr/>
-          <a:lstStyle/>
-          <a:p>
-            <a:r>
-              <a:rPr sz="2200" i="1">
-                <a:solidFill>
-                  <a:srgbClr val="FFFFFF"/>
-                </a:solidFill>
-                <a:latin typeface="Calibri"/>
-              </a:rPr>
-              <a:t>Day 3 • Session 8 • 30 minutes</a:t>
-            </a:r>
-          </a:p>
-          <a:p>
-            <a:r>
-              <a:rPr sz="1800">
-                <a:solidFill>
-                  <a:srgbClr val="FFFFFF"/>
-                </a:solidFill>
-                <a:latin typeface="Calibri"/>
-              </a:rPr>
-              <a:t>Find, classify, justify, and gate on vulnerabilities</a:t>
-            </a:r>
-          </a:p>
-        </p:txBody>
-      </p:sp>
-    </p:spTree>
-  </p:cSld>
-  <p:clrMapOvr>
-    <a:masterClrMapping/>
-  </p:clrMapOvr>
-</p:sld>
-</file>
-
-<file path=ppt/slides/slide8.xml><?xml version="1.0" encoding="utf-8"?>
-<p:sld xmlns:a="http://schemas.openxmlformats.org/drawingml/2006/main" xmlns:p="http://schemas.openxmlformats.org/presentationml/2006/main" xmlns:r="http://schemas.openxmlformats.org/officeDocument/2006/relationships">
-  <p:cSld>
-    <p:spTree>
-      <p:nvGrpSpPr>
-        <p:cNvPr id="1" name=""/>
-        <p:cNvGrpSpPr/>
-        <p:nvPr/>
-      </p:nvGrpSpPr>
-      <p:grpSpPr/>
-      <p:sp>
-        <p:nvSpPr>
-          <p:cNvPr id="2" name="Title 1"/>
-          <p:cNvSpPr>
-            <a:spLocks noGrp="1"/>
-          </p:cNvSpPr>
-          <p:nvPr>
-            <p:ph type="title"/>
-          </p:nvPr>
-        </p:nvSpPr>
-        <p:spPr/>
-        <p:txBody>
-          <a:bodyPr/>
-          <a:lstStyle/>
-          <a:p>
-            <a:r>
-              <a:rPr sz="3200" b="1">
-                <a:solidFill>
-                  <a:srgbClr val="CC0066"/>
-                </a:solidFill>
-                <a:latin typeface="Calibri"/>
-              </a:rPr>
-              <a:t>Session Agenda</a:t>
-            </a:r>
-          </a:p>
-        </p:txBody>
-      </p:sp>
-      <p:sp>
-        <p:nvSpPr>
-          <p:cNvPr id="3" name="TextBox 2"/>
-          <p:cNvSpPr txBox="1"/>
-          <p:nvPr/>
-        </p:nvSpPr>
-        <p:spPr>
-          <a:xfrm>
-            <a:off x="822960" y="1463040"/>
-            <a:ext cx="10515600" cy="5029200"/>
-          </a:xfrm>
-          <a:prstGeom prst="rect">
-            <a:avLst/>
-          </a:prstGeom>
-          <a:noFill/>
-        </p:spPr>
-        <p:txBody>
-          <a:bodyPr wrap="square" lIns="45720" rIns="45720">
-            <a:spAutoFit/>
-          </a:bodyPr>
-          <a:lstStyle/>
-          <a:p>
-            <a:pPr>
-              <a:spcAft>
-                <a:spcPts val="600"/>
-              </a:spcAft>
-            </a:pPr>
-            <a:r>
-              <a:rPr sz="2000" b="0" i="0">
-                <a:solidFill>
-                  <a:srgbClr val="333333"/>
-                </a:solidFill>
-                <a:latin typeface="Calibri"/>
-              </a:rPr>
-              <a:t>1.  cve-check — Yocto's CVE scanner</a:t>
-            </a:r>
-          </a:p>
-          <a:p>
-            <a:pPr>
-              <a:spcAft>
-                <a:spcPts val="600"/>
-              </a:spcAft>
-            </a:pPr>
-            <a:r>
-              <a:rPr sz="2000" b="0" i="0">
-                <a:solidFill>
-                  <a:srgbClr val="333333"/>
-                </a:solidFill>
-                <a:latin typeface="Calibri"/>
-              </a:rPr>
-              <a:t>2.  Reading a CVE report</a:t>
-            </a:r>
-          </a:p>
-          <a:p>
-            <a:pPr>
-              <a:spcAft>
-                <a:spcPts val="600"/>
-              </a:spcAft>
-            </a:pPr>
-            <a:r>
-              <a:rPr sz="2000" b="0" i="0">
-                <a:solidFill>
-                  <a:srgbClr val="333333"/>
-                </a:solidFill>
-                <a:latin typeface="Calibri"/>
-              </a:rPr>
-              <a:t>3.  Triage states: Patched, Ignored, Not affected</a:t>
-            </a:r>
-          </a:p>
-          <a:p>
-            <a:pPr>
-              <a:spcAft>
-                <a:spcPts val="600"/>
-              </a:spcAft>
-            </a:pPr>
-            <a:r>
-              <a:rPr sz="2000" b="0" i="0">
-                <a:solidFill>
-                  <a:srgbClr val="333333"/>
-                </a:solidFill>
-                <a:latin typeface="Calibri"/>
-              </a:rPr>
-              <a:t>4.  CVE_STATUS — writing justifications</a:t>
-            </a:r>
-          </a:p>
-          <a:p>
-            <a:pPr>
-              <a:spcAft>
-                <a:spcPts val="600"/>
-              </a:spcAft>
-            </a:pPr>
-            <a:r>
-              <a:rPr sz="2000" b="0" i="0">
-                <a:solidFill>
-                  <a:srgbClr val="333333"/>
-                </a:solidFill>
-                <a:latin typeface="Calibri"/>
-              </a:rPr>
-              <a:t>5.  VEX — communicating CVE status to customers</a:t>
-            </a:r>
-          </a:p>
-          <a:p>
-            <a:pPr>
-              <a:spcAft>
-                <a:spcPts val="600"/>
-              </a:spcAft>
-            </a:pPr>
-            <a:r>
-              <a:rPr sz="2000" b="0" i="0">
-                <a:solidFill>
-                  <a:srgbClr val="333333"/>
-                </a:solidFill>
-                <a:latin typeface="Calibri"/>
-              </a:rPr>
-              <a:t>6.  Release gating on CVE status</a:t>
-            </a:r>
-          </a:p>
-        </p:txBody>
-      </p:sp>
-    </p:spTree>
-  </p:cSld>
-  <p:clrMapOvr>
-    <a:masterClrMapping/>
-  </p:clrMapOvr>
-</p:sld>
-</file>
-
-<file path=ppt/slides/slide9.xml><?xml version="1.0" encoding="utf-8"?>
-<p:sld xmlns:a="http://schemas.openxmlformats.org/drawingml/2006/main" xmlns:p="http://schemas.openxmlformats.org/presentationml/2006/main" xmlns:r="http://schemas.openxmlformats.org/officeDocument/2006/relationships">
-  <p:cSld>
-    <p:spTree>
-      <p:nvGrpSpPr>
-        <p:cNvPr id="1" name=""/>
-        <p:cNvGrpSpPr/>
-        <p:nvPr/>
-      </p:nvGrpSpPr>
-      <p:grpSpPr/>
-      <p:sp>
-        <p:nvSpPr>
-          <p:cNvPr id="2" name="Title 1"/>
-          <p:cNvSpPr>
-            <a:spLocks noGrp="1"/>
-          </p:cNvSpPr>
-          <p:nvPr>
-            <p:ph type="title"/>
-          </p:nvPr>
-        </p:nvSpPr>
-        <p:spPr/>
-        <p:txBody>
-          <a:bodyPr/>
-          <a:lstStyle/>
-          <a:p>
-            <a:r>
-              <a:rPr sz="3200" b="1">
-                <a:solidFill>
-                  <a:srgbClr val="CC0066"/>
-                </a:solidFill>
-                <a:latin typeface="Calibri"/>
-              </a:rPr>
-              <a:t>cve-check — Yocto's Scanner</a:t>
-            </a:r>
-          </a:p>
-        </p:txBody>
-      </p:sp>
-      <p:sp>
-        <p:nvSpPr>
-          <p:cNvPr id="3" name="TextBox 2"/>
-          <p:cNvSpPr txBox="1"/>
-          <p:nvPr/>
-        </p:nvSpPr>
-        <p:spPr>
-          <a:xfrm>
-            <a:off x="822960" y="1417320"/>
-            <a:ext cx="10515600" cy="365760"/>
-          </a:xfrm>
-          <a:prstGeom prst="rect">
-            <a:avLst/>
-          </a:prstGeom>
-          <a:noFill/>
-        </p:spPr>
-        <p:txBody>
-          <a:bodyPr wrap="square" anchor="t" lIns="45720" rIns="45720">
-            <a:spAutoFit/>
-          </a:bodyPr>
-          <a:lstStyle/>
-          <a:p>
-            <a:pPr algn="l"/>
-            <a:r>
-              <a:rPr sz="1500" b="0" i="1">
-                <a:solidFill>
-                  <a:srgbClr val="666666"/>
-                </a:solidFill>
-                <a:latin typeface="Calibri"/>
-              </a:rPr>
-              <a:t>Compares your packages against the NVD CVE database.</a:t>
-            </a:r>
-          </a:p>
-        </p:txBody>
-      </p:sp>
-      <p:sp>
-        <p:nvSpPr>
-          <p:cNvPr id="4" name="Rounded Rectangle 3"/>
-          <p:cNvSpPr/>
-          <p:nvPr/>
-        </p:nvSpPr>
-        <p:spPr>
-          <a:xfrm>
-            <a:off x="822960" y="1783080"/>
-            <a:ext cx="10515600" cy="4572000"/>
-          </a:xfrm>
-          <a:prstGeom prst="roundRect">
-            <a:avLst/>
-          </a:prstGeom>
-          <a:solidFill>
-            <a:srgbClr val="F5F5F5"/>
-          </a:solidFill>
-          <a:ln w="6350">
-            <a:solidFill>
-              <a:srgbClr val="D0D0D0"/>
-            </a:solidFill>
-          </a:ln>
-          <a:effectLst/>
-        </p:spPr>
-        <p:style>
-          <a:lnRef idx="1">
-            <a:schemeClr val="accent1"/>
-          </a:lnRef>
-          <a:fillRef idx="3">
-            <a:schemeClr val="accent1"/>
-          </a:fillRef>
-          <a:effectRef idx="2">
-            <a:schemeClr val="accent1"/>
-          </a:effectRef>
-          <a:fontRef idx="minor">
-            <a:schemeClr val="lt1"/>
-          </a:fontRef>
-        </p:style>
-        <p:txBody>
-          <a:bodyPr rtlCol="0" anchor="ctr"/>
-          <a:lstStyle/>
-          <a:p>
-            <a:pPr algn="ctr"/>
-          </a:p>
-        </p:txBody>
-      </p:sp>
-      <p:sp>
-        <p:nvSpPr>
-          <p:cNvPr id="5" name="Rectangle 4"/>
-          <p:cNvSpPr/>
-          <p:nvPr/>
-        </p:nvSpPr>
-        <p:spPr>
-          <a:xfrm>
-            <a:off x="822960" y="1783080"/>
-            <a:ext cx="73152" cy="4572000"/>
-          </a:xfrm>
-          <a:prstGeom prst="rect">
-            <a:avLst/>
-          </a:prstGeom>
-          <a:solidFill>
-            <a:srgbClr val="CC0066"/>
-          </a:solidFill>
-          <a:ln>
-            <a:noFill/>
-          </a:ln>
-          <a:effectLst/>
-        </p:spPr>
-        <p:style>
-          <a:lnRef idx="1">
-            <a:schemeClr val="accent1"/>
-          </a:lnRef>
-          <a:fillRef idx="3">
-            <a:schemeClr val="accent1"/>
-          </a:fillRef>
-          <a:effectRef idx="2">
-            <a:schemeClr val="accent1"/>
-          </a:effectRef>
-          <a:fontRef idx="minor">
-            <a:schemeClr val="lt1"/>
-          </a:fontRef>
-        </p:style>
-        <p:txBody>
-          <a:bodyPr rtlCol="0" anchor="ctr"/>
-          <a:lstStyle/>
-          <a:p>
-            <a:pPr algn="ctr"/>
-          </a:p>
-        </p:txBody>
-      </p:sp>
-      <p:sp>
-        <p:nvSpPr>
-          <p:cNvPr id="6" name="TextBox 5"/>
-          <p:cNvSpPr txBox="1"/>
-          <p:nvPr/>
-        </p:nvSpPr>
-        <p:spPr>
-          <a:xfrm>
-            <a:off x="1005840" y="1874519"/>
-            <a:ext cx="10241280" cy="4389120"/>
-          </a:xfrm>
-          <a:prstGeom prst="rect">
-            <a:avLst/>
-          </a:prstGeom>
-          <a:noFill/>
-        </p:spPr>
-        <p:txBody>
-          <a:bodyPr wrap="square" lIns="45720" rIns="45720">
-            <a:spAutoFit/>
-          </a:bodyPr>
-          <a:lstStyle/>
-          <a:p>
-            <a:pPr>
-              <a:spcAft>
-                <a:spcPts val="0"/>
-              </a:spcAft>
-            </a:pPr>
-            <a:r>
-              <a:rPr sz="1000" i="1">
-                <a:solidFill>
-                  <a:srgbClr val="808080"/>
-                </a:solidFill>
-                <a:latin typeface="Consolas"/>
-              </a:rPr>
-              <a:t># Enable in local.conf</a:t>
-            </a:r>
-          </a:p>
-          <a:p>
-            <a:pPr>
-              <a:spcAft>
-                <a:spcPts val="0"/>
-              </a:spcAft>
-            </a:pPr>
-            <a:r>
-              <a:rPr sz="1000">
-                <a:solidFill>
-                  <a:srgbClr val="2D2D2D"/>
-                </a:solidFill>
-                <a:latin typeface="Consolas"/>
-              </a:rPr>
-              <a:t>INHERIT += "cve-check"</a:t>
-            </a:r>
-          </a:p>
-          <a:p>
-            <a:pPr>
-              <a:spcAft>
-                <a:spcPts val="0"/>
-              </a:spcAft>
-            </a:pPr>
-            <a:r>
-              <a:rPr sz="1000">
-                <a:solidFill>
-                  <a:srgbClr val="2D2D2D"/>
-                </a:solidFill>
-                <a:latin typeface="Consolas"/>
-              </a:rPr>
-              <a:t> </a:t>
-            </a:r>
-          </a:p>
-          <a:p>
-            <a:pPr>
-              <a:spcAft>
-                <a:spcPts val="0"/>
-              </a:spcAft>
-            </a:pPr>
-            <a:r>
-              <a:rPr sz="1000" i="1">
-                <a:solidFill>
-                  <a:srgbClr val="808080"/>
-                </a:solidFill>
-                <a:latin typeface="Consolas"/>
-              </a:rPr>
-              <a:t># Build (first run downloads the NVD feed, can take 5-10 min)</a:t>
-            </a:r>
-          </a:p>
-          <a:p>
-            <a:pPr>
-              <a:spcAft>
-                <a:spcPts val="0"/>
-              </a:spcAft>
-            </a:pPr>
-            <a:r>
-              <a:rPr sz="1000">
-                <a:solidFill>
-                  <a:srgbClr val="2D2D2D"/>
-                </a:solidFill>
-                <a:latin typeface="Consolas"/>
-              </a:rPr>
-              <a:t>bitbake core-image-base</a:t>
-            </a:r>
-          </a:p>
-          <a:p>
-            <a:pPr>
-              <a:spcAft>
-                <a:spcPts val="0"/>
-              </a:spcAft>
-            </a:pPr>
-            <a:r>
-              <a:rPr sz="1000">
-                <a:solidFill>
-                  <a:srgbClr val="2D2D2D"/>
-                </a:solidFill>
-                <a:latin typeface="Consolas"/>
-              </a:rPr>
-              <a:t> </a:t>
-            </a:r>
-          </a:p>
-          <a:p>
-            <a:pPr>
-              <a:spcAft>
-                <a:spcPts val="0"/>
-              </a:spcAft>
-            </a:pPr>
-            <a:r>
-              <a:rPr sz="1000" i="1">
-                <a:solidFill>
-                  <a:srgbClr val="808080"/>
-                </a:solidFill>
-                <a:latin typeface="Consolas"/>
-              </a:rPr>
-              <a:t># Find reports</a:t>
-            </a:r>
-          </a:p>
-          <a:p>
-            <a:pPr>
-              <a:spcAft>
-                <a:spcPts val="0"/>
-              </a:spcAft>
-            </a:pPr>
-            <a:r>
-              <a:rPr sz="1000">
-                <a:solidFill>
-                  <a:srgbClr val="2D2D2D"/>
-                </a:solidFill>
-                <a:latin typeface="Consolas"/>
-              </a:rPr>
-              <a:t>ls tmp/deploy/cve/</a:t>
-            </a:r>
-          </a:p>
-          <a:p>
-            <a:pPr>
-              <a:spcAft>
-                <a:spcPts val="0"/>
-              </a:spcAft>
-            </a:pPr>
-            <a:r>
-              <a:rPr sz="1000" i="1">
-                <a:solidFill>
-                  <a:srgbClr val="808080"/>
-                </a:solidFill>
-                <a:latin typeface="Consolas"/>
-              </a:rPr>
-              <a:t># Per-recipe: tmp/work/.../mypkg/.../cve_check</a:t>
-            </a:r>
-          </a:p>
-          <a:p>
-            <a:pPr>
-              <a:spcAft>
-                <a:spcPts val="0"/>
-              </a:spcAft>
-            </a:pPr>
-            <a:r>
-              <a:rPr sz="1000" i="1">
-                <a:solidFill>
-                  <a:srgbClr val="808080"/>
-                </a:solidFill>
-                <a:latin typeface="Consolas"/>
-              </a:rPr>
-              <a:t># Per-image: tmp/deploy/cve/core-image-base-&lt;machine&gt;.txt</a:t>
-            </a:r>
-          </a:p>
-          <a:p>
-            <a:pPr>
-              <a:spcAft>
-                <a:spcPts val="0"/>
-              </a:spcAft>
-            </a:pPr>
-            <a:r>
-              <a:rPr sz="1000">
-                <a:solidFill>
-                  <a:srgbClr val="2D2D2D"/>
-                </a:solidFill>
-                <a:latin typeface="Consolas"/>
-              </a:rPr>
-              <a:t> </a:t>
-            </a:r>
-          </a:p>
-          <a:p>
-            <a:pPr>
-              <a:spcAft>
-                <a:spcPts val="0"/>
-              </a:spcAft>
-            </a:pPr>
-            <a:r>
-              <a:rPr sz="1000" i="1">
-                <a:solidFill>
-                  <a:srgbClr val="808080"/>
-                </a:solidFill>
-                <a:latin typeface="Consolas"/>
-              </a:rPr>
-              <a:t># Read the image-level summary</a:t>
-            </a:r>
-          </a:p>
-          <a:p>
-            <a:pPr>
-              <a:spcAft>
-                <a:spcPts val="0"/>
-              </a:spcAft>
-            </a:pPr>
-            <a:r>
-              <a:rPr sz="1000">
-                <a:solidFill>
-                  <a:srgbClr val="2D2D2D"/>
-                </a:solidFill>
-                <a:latin typeface="Consolas"/>
-              </a:rPr>
-              <a:t>cat tmp/deploy/cve/core-image-base-*.txt</a:t>
-            </a:r>
-          </a:p>
-          <a:p>
-            <a:pPr>
-              <a:spcAft>
-                <a:spcPts val="0"/>
-              </a:spcAft>
-            </a:pPr>
-            <a:r>
-              <a:rPr sz="1000">
-                <a:solidFill>
-                  <a:srgbClr val="2D2D2D"/>
-                </a:solidFill>
-                <a:latin typeface="Consolas"/>
-              </a:rPr>
-              <a:t> </a:t>
-            </a:r>
-          </a:p>
-          <a:p>
-            <a:pPr>
-              <a:spcAft>
-                <a:spcPts val="0"/>
-              </a:spcAft>
-            </a:pPr>
-            <a:r>
-              <a:rPr sz="1000" i="1">
-                <a:solidFill>
-                  <a:srgbClr val="808080"/>
-                </a:solidFill>
-                <a:latin typeface="Consolas"/>
-              </a:rPr>
-              <a:t># Format:</a:t>
-            </a:r>
-          </a:p>
-          <a:p>
-            <a:pPr>
-              <a:spcAft>
-                <a:spcPts val="0"/>
-              </a:spcAft>
-            </a:pPr>
-            <a:r>
-              <a:rPr sz="1000" i="1">
-                <a:solidFill>
-                  <a:srgbClr val="808080"/>
-                </a:solidFill>
-                <a:latin typeface="Consolas"/>
-              </a:rPr>
-              <a:t># PACKAGE NAME: openssl</a:t>
-            </a:r>
-          </a:p>
-          <a:p>
-            <a:pPr>
-              <a:spcAft>
-                <a:spcPts val="0"/>
-              </a:spcAft>
-            </a:pPr>
-            <a:r>
-              <a:rPr sz="1000" i="1">
-                <a:solidFill>
-                  <a:srgbClr val="808080"/>
-                </a:solidFill>
-                <a:latin typeface="Consolas"/>
-              </a:rPr>
-              <a:t># PACKAGE VERSION: 3.0.10</a:t>
-            </a:r>
-          </a:p>
-          <a:p>
-            <a:pPr>
-              <a:spcAft>
-                <a:spcPts val="0"/>
-              </a:spcAft>
-            </a:pPr>
-            <a:r>
-              <a:rPr sz="1000" i="1">
-                <a:solidFill>
-                  <a:srgbClr val="808080"/>
-                </a:solidFill>
-                <a:latin typeface="Consolas"/>
-              </a:rPr>
-              <a:t># CVE: CVE-2023-3446</a:t>
-            </a:r>
-          </a:p>
-          <a:p>
-            <a:pPr>
-              <a:spcAft>
-                <a:spcPts val="0"/>
-              </a:spcAft>
-            </a:pPr>
-            <a:r>
-              <a:rPr sz="1000" i="1">
-                <a:solidFill>
-                  <a:srgbClr val="808080"/>
-                </a:solidFill>
-                <a:latin typeface="Consolas"/>
-              </a:rPr>
-              <a:t># CVE STATUS: Patched</a:t>
-            </a:r>
-          </a:p>
-          <a:p>
-            <a:pPr>
-              <a:spcAft>
-                <a:spcPts val="0"/>
-              </a:spcAft>
-            </a:pPr>
-            <a:r>
-              <a:rPr sz="1000" i="1">
-                <a:solidFill>
-                  <a:srgbClr val="808080"/>
-                </a:solidFill>
-                <a:latin typeface="Consolas"/>
-              </a:rPr>
-              <a:t># CVE SUMMARY: Excessive time in DH_check_pub_key()...</a:t>
-            </a:r>
-          </a:p>
-          <a:p>
-            <a:pPr>
-              <a:spcAft>
-                <a:spcPts val="0"/>
-              </a:spcAft>
-            </a:pPr>
-            <a:r>
-              <a:rPr sz="1000" i="1">
-                <a:solidFill>
-                  <a:srgbClr val="808080"/>
-                </a:solidFill>
-                <a:latin typeface="Consolas"/>
-              </a:rPr>
-              <a:t># CVSS v3 SCORE: 5.3</a:t>
-            </a:r>
-          </a:p>
-          <a:p>
-            <a:pPr>
-              <a:spcAft>
-                <a:spcPts val="0"/>
-              </a:spcAft>
-            </a:pPr>
-            <a:r>
-              <a:rPr sz="1000" i="1">
-                <a:solidFill>
-                  <a:srgbClr val="808080"/>
-                </a:solidFill>
-                <a:latin typeface="Consolas"/>
-              </a:rPr>
-              <a:t># VECTOR: NETWORK</a:t>
-            </a:r>
-          </a:p>
-          <a:p>
-            <a:pPr>
-              <a:spcAft>
-                <a:spcPts val="0"/>
-              </a:spcAft>
-            </a:pPr>
-            <a:r>
-              <a:rPr sz="1000" i="1">
-                <a:solidFill>
-                  <a:srgbClr val="808080"/>
-                </a:solidFill>
-                <a:latin typeface="Consolas"/>
-              </a:rPr>
-              <a:t># MORE INFORMATION: https://nvd.nist.gov/vuln/detail/CVE-2023-3446</a:t>
             </a:r>
           </a:p>
         </p:txBody>
